--- a/202610_清水グループ御中_LINE公式アカウント運用のご提案.pptx
+++ b/202610_清水グループ御中_LINE公式アカウント運用のご提案.pptx
@@ -11631,7 +11631,7 @@
                 <a:ea typeface="メイリオ"/>
                 <a:cs typeface="メイリオ"/>
               </a:rPr>
-              <a:t>［第4章］概算お見積り：6か月目に追える人数662人</a:t>
+              <a:t>［第4章］概算お見積り：6か月目に追える人数679人</a:t>
             </a:r>
           </a:p>
         </p:txBody>
@@ -14327,7 +14327,7 @@
                 <a:ea typeface="メイリオ"/>
                 <a:cs typeface="メイリオ"/>
               </a:rPr>
-              <a:t>662人</a:t>
+              <a:t>679人</a:t>
             </a:r>
             <a:endParaRPr lang="en-US" sz="1400" b="0" u="none" strike="noStrike">
               <a:solidFill>

--- a/202610_清水グループ御中_LINE公式アカウント運用のご提案.pptx
+++ b/202610_清水グループ御中_LINE公式アカウント運用のご提案.pptx
@@ -7940,7 +7940,7 @@
                 <a:ea typeface="メイリオ"/>
                 <a:cs typeface="メイリオ"/>
               </a:rPr>
-              <a:t>松：D 運用代行フルサポート</a:t>
+              <a:t>運用代行フルサポート</a:t>
             </a:r>
           </a:p>
         </p:txBody>
@@ -8161,7 +8161,7 @@
                 <a:ea typeface="メイリオ"/>
                 <a:cs typeface="メイリオ"/>
               </a:rPr>
-              <a:t>竹：A コンサル基本</a:t>
+              <a:t>コンサル基本</a:t>
             </a:r>
           </a:p>
         </p:txBody>
@@ -8325,7 +8325,7 @@
                 <a:ea typeface="メイリオ"/>
                 <a:cs typeface="メイリオ"/>
               </a:rPr>
-              <a:t>梅：C 初期設計・構築のみ</a:t>
+              <a:t>初期設計・構築のみ</a:t>
             </a:r>
           </a:p>
         </p:txBody>
@@ -8862,7 +8862,7 @@
                 <a:ea typeface="メイリオ"/>
                 <a:cs typeface="メイリオ"/>
               </a:rPr>
-              <a:t>まずは梅（初期設計・構築のみ・月額0円）から始めることも可能</a:t>
+              <a:t>まずは初期設計・構築のみ（月額0円）から始めることも可能</a:t>
             </a:r>
           </a:p>
         </p:txBody>
@@ -11672,7 +11672,7 @@
                 <a:ea typeface="メイリオ"/>
                 <a:cs typeface="メイリオ"/>
               </a:rPr>
-              <a:t>竹（コンサル基本）で運用した場合の費用と、6か月後の見込み。</a:t>
+              <a:t>コンサル基本のプランで運用した場合の費用と、6か月後の見込み。</a:t>
             </a:r>
           </a:p>
         </p:txBody>
